--- a/week-05/presentations/ppts/day-02-cloud-architecture-infrastructure.pptx
+++ b/week-05/presentations/ppts/day-02-cloud-architecture-infrastructure.pptx
@@ -1448,7 +1448,7 @@
             </a:pPr>
             <a:r>
               <a:rPr/>
-              <a:t>By 16:00, every triad has TMD §2 with topology + cost.</a:t>
+              <a:t>By 16:00, every triad has TMD Section 2 with topology + cost.</a:t>
             </a:r>
           </a:p>
         </p:txBody>
@@ -2022,7 +2022,7 @@
             </a:pPr>
             <a:r>
               <a:rPr/>
-              <a:t>Today’s TMD §2 captures all five.</a:t>
+              <a:t>Today’s TMD Section 2 captures all five.</a:t>
             </a:r>
           </a:p>
         </p:txBody>
@@ -5848,7 +5848,7 @@
             </a:pPr>
             <a:r>
               <a:rPr/>
-              <a:t>5 min: list each container (TCD §2)</a:t>
+              <a:t>5 min: list each container (TCD Section 2)</a:t>
             </a:r>
           </a:p>
           <a:p>
@@ -6421,7 +6421,7 @@
             </a:pPr>
             <a:r>
               <a:rPr/>
-              <a:t>10 min: customer tenancy expectations (PRD §1)</a:t>
+              <a:t>10 min: customer tenancy expectations (PRD Section 1)</a:t>
             </a:r>
           </a:p>
           <a:p>
@@ -6448,7 +6448,7 @@
             </a:pPr>
             <a:r>
               <a:rPr/>
-              <a:t>5 min: stakeholder implications (add to TCD §6 if missing)</a:t>
+              <a:t>5 min: stakeholder implications (add to TCD Section 6 if missing)</a:t>
             </a:r>
           </a:p>
           <a:p>
@@ -7017,7 +7017,7 @@
             </a:pPr>
             <a:r>
               <a:rPr/>
-              <a:t>🧿 AI Sanity Check</a:t>
+              <a:t>🤖 AI Sanity Check</a:t>
             </a:r>
           </a:p>
         </p:txBody>
@@ -7128,7 +7128,7 @@
             </a:pPr>
             <a:r>
               <a:rPr/>
-              <a:t>10 min: polish §2 + provenance note</a:t>
+              <a:t>10 min: polish Section 2 + provenance note</a:t>
             </a:r>
           </a:p>
           <a:p>
@@ -7254,7 +7254,7 @@
             </a:pPr>
             <a:r>
               <a:rPr/>
-              <a:t>TMD §2 drafted</a:t>
+              <a:t>TMD Section 2 drafted</a:t>
             </a:r>
           </a:p>
           <a:p>
@@ -7299,7 +7299,7 @@
             </a:pPr>
             <a:r>
               <a:rPr/>
-              <a:t>Bring to Day 3: TMD §§1–2 + your data model. APIs ride on top of both tomorrow.</a:t>
+              <a:t>Bring to Day 3: TMD Sections 1–2 + your data model. APIs ride on top of both tomorrow.</a:t>
             </a:r>
           </a:p>
         </p:txBody>
@@ -7599,7 +7599,7 @@
             </a:pPr>
             <a:r>
               <a:rPr/>
-              <a:t>Pin TMD §1 on the wall</a:t>
+              <a:t>Pin TMD Section 1 on the wall</a:t>
             </a:r>
           </a:p>
           <a:p>
@@ -8255,16 +8255,16 @@
             </a:pPr>
             <a:r>
               <a:rPr/>
-              <a:t>5 min: pull customer location facts (PRD §2)</a:t>
-            </a:r>
-          </a:p>
-          <a:p>
-            <a:pPr lvl="0" indent="0" marL="0">
-              <a:buNone/>
-            </a:pPr>
-            <a:r>
-              <a:rPr/>
-              <a:t>5 min: pull compliance facts (TCD §3)</a:t>
+              <a:t>5 min: pull customer location facts (PRD Section 2)</a:t>
+            </a:r>
+          </a:p>
+          <a:p>
+            <a:pPr lvl="0" indent="0" marL="0">
+              <a:buNone/>
+            </a:pPr>
+            <a:r>
+              <a:rPr/>
+              <a:t>5 min: pull compliance facts (TCD Section 3)</a:t>
             </a:r>
           </a:p>
           <a:p>

--- a/week-05/presentations/ppts/day-02-cloud-architecture-infrastructure.pptx
+++ b/week-05/presentations/ppts/day-02-cloud-architecture-infrastructure.pptx
@@ -6292,7 +6292,7 @@
             </a:pPr>
             <a:r>
               <a:rPr/>
-              <a:t>Default for B2B SaaS APIs. Standard TLS; nothing else.</a:t>
+              <a:t>Default for B2B SaaS APIs. Standard Transport Layer Security (TLS); nothing else.</a:t>
             </a:r>
           </a:p>
           <a:p>
@@ -7254,7 +7254,7 @@
             </a:pPr>
             <a:r>
               <a:rPr/>
-              <a:t>TMD Section 2 drafted</a:t>
+              <a:t>Technical Modeling Document (TMD) Section 2 drafted</a:t>
             </a:r>
           </a:p>
           <a:p>
@@ -7482,7 +7482,7 @@
             </a:pPr>
             <a:r>
               <a:rPr/>
-              <a:t>Add a ROM cost table — catch 2x surprises before they ship</a:t>
+              <a:t>Add a rough order of magnitude (ROM) cost table — catch 2x surprises before they ship</a:t>
             </a:r>
           </a:p>
         </p:txBody>
@@ -8176,6 +8176,31 @@
           </a:p>
         </p:txBody>
       </p:sp>
+      <p:sp>
+        <p:nvSpPr>
+          <p:cNvPr id="3" name="Content Placeholder 2"/>
+          <p:cNvSpPr>
+            <a:spLocks noGrp="1"/>
+          </p:cNvSpPr>
+          <p:nvPr>
+            <p:ph idx="1"/>
+          </p:nvPr>
+        </p:nvSpPr>
+        <p:spPr/>
+        <p:txBody>
+          <a:bodyPr/>
+          <a:lstStyle/>
+          <a:p>
+            <a:pPr lvl="0" indent="0" marL="0">
+              <a:buNone/>
+            </a:pPr>
+            <a:r>
+              <a:rPr/>
+              <a:t>The warm disaster-recovery (DR) choice is judged against our availability Service Level Objective (SLO).</a:t>
+            </a:r>
+          </a:p>
+        </p:txBody>
+      </p:sp>
     </p:spTree>
   </p:cSld>
 </p:sld>
@@ -8255,16 +8280,16 @@
             </a:pPr>
             <a:r>
               <a:rPr/>
-              <a:t>5 min: pull customer location facts (PRD Section 2)</a:t>
-            </a:r>
-          </a:p>
-          <a:p>
-            <a:pPr lvl="0" indent="0" marL="0">
-              <a:buNone/>
-            </a:pPr>
-            <a:r>
-              <a:rPr/>
-              <a:t>5 min: pull compliance facts (TCD Section 3)</a:t>
+              <a:t>5 min: pull customer location facts from Product Requirements Document (PRD) Section 2</a:t>
+            </a:r>
+          </a:p>
+          <a:p>
+            <a:pPr lvl="0" indent="0" marL="0">
+              <a:buNone/>
+            </a:pPr>
+            <a:r>
+              <a:rPr/>
+              <a:t>5 min: pull compliance facts from Technical Concept Document (TCD) Section 3</a:t>
             </a:r>
           </a:p>
           <a:p>

--- a/week-05/presentations/ppts/day-02-cloud-architecture-infrastructure.pptx
+++ b/week-05/presentations/ppts/day-02-cloud-architecture-infrastructure.pptx
@@ -5602,7 +5602,7 @@
             </a:pPr>
             <a:r>
               <a:rPr/>
-              <a:t>AWS RDS</a:t>
+              <a:t>Azure Database for PostgreSQL</a:t>
             </a:r>
           </a:p>
           <a:p>
@@ -5629,16 +5629,16 @@
             </a:pPr>
             <a:r>
               <a:rPr/>
-              <a:t>Kafka</a:t>
-            </a:r>
-          </a:p>
-          <a:p>
-            <a:pPr lvl="0" indent="0" marL="0">
-              <a:buNone/>
-            </a:pPr>
-            <a:r>
-              <a:rPr/>
-              <a:t>AWS MSK</a:t>
+              <a:t>Event Hubs</a:t>
+            </a:r>
+          </a:p>
+          <a:p>
+            <a:pPr lvl="0" indent="0" marL="0">
+              <a:buNone/>
+            </a:pPr>
+            <a:r>
+              <a:rPr/>
+              <a:t>Azure Event Hubs</a:t>
             </a:r>
           </a:p>
           <a:p>
@@ -5674,7 +5674,7 @@
             </a:pPr>
             <a:r>
               <a:rPr/>
-              <a:t>S3</a:t>
+              <a:t>Blob Storage</a:t>
             </a:r>
           </a:p>
           <a:p>
@@ -5746,7 +5746,7 @@
             </a:pPr>
             <a:r>
               <a:rPr/>
-              <a:t>ALB</a:t>
+              <a:t>Application Gateway</a:t>
             </a:r>
           </a:p>
           <a:p>
@@ -6319,7 +6319,7 @@
             </a:pPr>
             <a:r>
               <a:rPr/>
-              <a:t>Direct Connect / PrivateLink</a:t>
+              <a:t>ExpressRoute / Private Link</a:t>
             </a:r>
           </a:p>
           <a:p>
@@ -6642,7 +6642,7 @@
                 </a:pPr>
                 <a:r>
                   <a:rPr/>
-                  <a:t>Postgres (RDS)</a:t>
+                  <a:t>Azure Database for PostgreSQL</a:t>
                 </a:r>
               </a:p>
               <a:p>
@@ -6651,7 +6651,7 @@
                 </a:pPr>
                 <a:r>
                   <a:rPr/>
-                  <a:t>Multi-AZ db.m5.large</a:t>
+                  <a:t>Multi-AZ, 2 vCore GP</a:t>
                 </a:r>
               </a:p>
               <a:p>
@@ -6714,7 +6714,7 @@
                 </a:pPr>
                 <a:r>
                   <a:rPr/>
-                  <a:t>Kafka (MSK)</a:t>
+                  <a:t>Event Hubs</a:t>
                 </a:r>
               </a:p>
               <a:p>
@@ -6723,7 +6723,7 @@
                 </a:pPr>
                 <a:r>
                   <a:rPr/>
-                  <a:t>3-broker m5.large</a:t>
+                  <a:t>Standard, 5 TUs</a:t>
                 </a:r>
               </a:p>
               <a:p>
@@ -6741,7 +6741,7 @@
                 </a:pPr>
                 <a:r>
                   <a:rPr/>
-                  <a:t>Brokers; storage; egress</a:t>
+                  <a:t>Throughput units; storage; egress</a:t>
                 </a:r>
               </a:p>
               <a:p>
@@ -6750,7 +6750,7 @@
                 </a:pPr>
                 <a:r>
                   <a:rPr/>
-                  <a:t>S3 (audit)</a:t>
+                  <a:t>Blob Storage (audit)</a:t>
                 </a:r>
               </a:p>
               <a:p>
@@ -6777,7 +6777,7 @@
                 </a:pPr>
                 <a:r>
                   <a:rPr/>
-                  <a:t>Storage; PUT/GET</a:t>
+                  <a:t>Storage; read/write ops</a:t>
                 </a:r>
               </a:p>
               <a:p>
@@ -6786,7 +6786,7 @@
                 </a:pPr>
                 <a:r>
                   <a:rPr/>
-                  <a:t>ALB</a:t>
+                  <a:t>Application Gateway</a:t>
                 </a:r>
               </a:p>
               <a:p>
@@ -6813,7 +6813,7 @@
                 </a:pPr>
                 <a:r>
                   <a:rPr/>
-                  <a:t>Hours + LCUs</a:t>
+                  <a:t>Hours + CUs</a:t>
                 </a:r>
               </a:p>
               <a:p>
@@ -7022,6 +7022,42 @@
           </a:p>
         </p:txBody>
       </p:sp>
+      <p:sp>
+        <p:nvSpPr>
+          <p:cNvPr id="3" name="Content Placeholder 2"/>
+          <p:cNvSpPr>
+            <a:spLocks noGrp="1"/>
+          </p:cNvSpPr>
+          <p:nvPr>
+            <p:ph idx="1"/>
+          </p:nvPr>
+        </p:nvSpPr>
+        <p:spPr/>
+        <p:txBody>
+          <a:bodyPr/>
+          <a:lstStyle/>
+          <a:p>
+            <a:pPr lvl="0" indent="0">
+              <a:buNone/>
+            </a:pPr>
+            <a:r>
+              <a:rPr>
+                <a:latin typeface="Courier"/>
+              </a:rPr>
+              <a:t>Role: SRE reviewing a feature's cloud topology.
+Context: &lt;paste TMD Section 2 sections — region, AZ, managed services,
+tenancy, network boundary, ROM cost&gt;
+Task: Identify the top 3 risks in this topology that could
+surprise the team within 6 months.
+Constraints:
+- Be specific to the configurations described
+- For each: scenario, likelihood (L/M/H), suggested mitigation
+- Do not invent platform features
+Format: Numbered — Risk / Scenario / Likelihood / Mitigation.</a:t>
+            </a:r>
+          </a:p>
+        </p:txBody>
+      </p:sp>
     </p:spTree>
   </p:cSld>
 </p:sld>
@@ -7881,7 +7917,7 @@
             </a:pPr>
             <a:r>
               <a:rPr/>
-              <a:t>A geographic cloud location (us-east-1)</a:t>
+              <a:t>A geographic cloud location (East US)</a:t>
             </a:r>
           </a:p>
           <a:p>
@@ -7935,7 +7971,7 @@
             </a:pPr>
             <a:r>
               <a:rPr/>
-              <a:t>Cloud provider runs it (RDS, S3, SQS)</a:t>
+              <a:t>Cloud provider runs it (Azure Database for PostgreSQL, Blob Storage, Service Bus)</a:t>
             </a:r>
           </a:p>
           <a:p>
@@ -8115,7 +8151,7 @@
             </a:pPr>
             <a:r>
               <a:rPr/>
-              <a:t>Network boundary — public, VPN, Direct Connect</a:t>
+              <a:t>Network boundary — public, VPN, ExpressRoute</a:t>
             </a:r>
           </a:p>
           <a:p>
@@ -8190,6 +8226,29 @@
         <p:txBody>
           <a:bodyPr/>
           <a:lstStyle/>
+          <a:p>
+            <a:pPr lvl="0" indent="0">
+              <a:buNone/>
+            </a:pPr>
+            <a:r>
+              <a:rPr>
+                <a:latin typeface="Courier"/>
+              </a:rPr>
+              <a:t>**Region:** East US (primary), West US 2 (warm-DR).
+- Customer base: 92% US; 8% Canada (cross-region OK; +80ms)
+- Compliance: SOC 2 audit retention requires named region
+**AZ stance:** Multi-AZ active-active for stateful tiers
+(Postgres primary + 2 read replicas across 3 AZs).
+**Trade-off — multi-region active-active vs warm-DR:**
+**Choice:** Warm-DR (Option A).
+**Why:** Active-active doubles cost and adds cross-region
+consistency complexity; multi-AZ within East US
+satisfies our 99.5% availability SLO.
+**Accepted cost:** Full East US outage breaches SLO ~30 min.
+**Revisit trigger:** Second multi-hour East US outage in
+12 months, OR availability SLO tightens to 99.9%+.</a:t>
+            </a:r>
+          </a:p>
           <a:p>
             <a:pPr lvl="0" indent="0" marL="0">
               <a:buNone/>

--- a/week-05/presentations/ppts/day-02-cloud-architecture-infrastructure.pptx
+++ b/week-05/presentations/ppts/day-02-cloud-architecture-infrastructure.pptx
@@ -710,7 +710,7 @@
             </a:pPr>
             <a:r>
               <a:rPr/>
-              <a:t>If a triad’s table is mostly self-managed, surface the operational cost.</a:t>
+              <a:t>If a quad’s table is mostly self-managed, surface the operational cost.</a:t>
             </a:r>
           </a:p>
         </p:txBody>
@@ -1448,7 +1448,7 @@
             </a:pPr>
             <a:r>
               <a:rPr/>
-              <a:t>By 16:00, every triad has TMD Section 2 with topology + cost.</a:t>
+              <a:t>By 16:00, every quad has TMD Section 2 with topology + cost.</a:t>
             </a:r>
           </a:p>
         </p:txBody>
@@ -1530,7 +1530,7 @@
             </a:pPr>
             <a:r>
               <a:rPr/>
-              <a:t>Wrap-share: each triad names region/AZ stance, 1 trade-off, 1 cost surprise.</a:t>
+              <a:t>Wrap-share: each quad names region/AZ stance, 1 trade-off, 1 cost surprise.</a:t>
             </a:r>
           </a:p>
         </p:txBody>
@@ -1858,7 +1858,7 @@
             </a:pPr>
             <a:r>
               <a:rPr/>
-              <a:t>Region and AZ choices intersect with residency, latency, and cost. Coach triads to defend any multi-region active-active stance — it’s expensive without specific need.</a:t>
+              <a:t>Region and AZ choices intersect with residency, latency, and cost. Coach quads to defend any multi-region active-active stance — it’s expensive without specific need.</a:t>
             </a:r>
           </a:p>
         </p:txBody>
@@ -2186,7 +2186,7 @@
             </a:pPr>
             <a:r>
               <a:rPr/>
-              <a:t>Push back on triads who default to multi-region active-active without justification — it’s expensive.</a:t>
+              <a:t>Push back on quads who default to multi-region active-active without justification — it’s expensive.</a:t>
             </a:r>
           </a:p>
         </p:txBody>
@@ -2268,7 +2268,7 @@
             </a:pPr>
             <a:r>
               <a:rPr/>
-              <a:t>Managed is the default. The four-question test forces triads to name a specific reason before going self-managed — not a vibe about control.</a:t>
+              <a:t>Managed is the default. The four-question test forces quads to name a specific reason before going self-managed — not a vibe about control.</a:t>
             </a:r>
           </a:p>
         </p:txBody>
@@ -5839,7 +5839,7 @@
             </a:pPr>
             <a:r>
               <a:rPr b="1"/>
-              <a:t>Triads • 40 minutes</a:t>
+              <a:t>Quads • 40 minutes</a:t>
             </a:r>
           </a:p>
           <a:p>
@@ -6412,7 +6412,7 @@
             </a:pPr>
             <a:r>
               <a:rPr b="1"/>
-              <a:t>Triads • 40 minutes</a:t>
+              <a:t>Quads • 40 minutes</a:t>
             </a:r>
           </a:p>
           <a:p>
@@ -7128,7 +7128,7 @@
             </a:pPr>
             <a:r>
               <a:rPr b="1"/>
-              <a:t>Triads • 45 minutes • Wrap</a:t>
+              <a:t>Quads • 45 minutes • Wrap</a:t>
             </a:r>
           </a:p>
           <a:p>
@@ -8330,7 +8330,7 @@
             </a:pPr>
             <a:r>
               <a:rPr b="1"/>
-              <a:t>Triads • 35 minutes</a:t>
+              <a:t>Quads • 35 minutes</a:t>
             </a:r>
           </a:p>
           <a:p>

--- a/week-05/presentations/ppts/day-02-cloud-architecture-infrastructure.pptx
+++ b/week-05/presentations/ppts/day-02-cloud-architecture-infrastructure.pptx
@@ -5839,7 +5839,7 @@
             </a:pPr>
             <a:r>
               <a:rPr b="1"/>
-              <a:t>Quads • 40 minutes</a:t>
+              <a:t>Quads • 50 minutes</a:t>
             </a:r>
           </a:p>
           <a:p>
@@ -6412,7 +6412,7 @@
             </a:pPr>
             <a:r>
               <a:rPr b="1"/>
-              <a:t>Quads • 40 minutes</a:t>
+              <a:t>Quads • 50 minutes</a:t>
             </a:r>
           </a:p>
           <a:p>
@@ -7128,7 +7128,7 @@
             </a:pPr>
             <a:r>
               <a:rPr b="1"/>
-              <a:t>Quads • 45 minutes • Wrap</a:t>
+              <a:t>Quads • 55 minutes • Wrap</a:t>
             </a:r>
           </a:p>
           <a:p>
@@ -8330,7 +8330,7 @@
             </a:pPr>
             <a:r>
               <a:rPr b="1"/>
-              <a:t>Quads • 35 minutes</a:t>
+              <a:t>Quads • 45 minutes</a:t>
             </a:r>
           </a:p>
           <a:p>

--- a/week-05/presentations/ppts/day-02-cloud-architecture-infrastructure.pptx
+++ b/week-05/presentations/ppts/day-02-cloud-architecture-infrastructure.pptx
@@ -5866,7 +5866,7 @@
             </a:pPr>
             <a:r>
               <a:rPr/>
-              <a:t>15 min: managed vs self per container (4-question test)</a:t>
+              <a:t>25 min: managed vs self per container (4-question test)</a:t>
             </a:r>
           </a:p>
           <a:p>
@@ -5884,7 +5884,7 @@
             </a:pPr>
             <a:r>
               <a:rPr/>
-              <a:t>⏱ 5 + 10 + 15 + 10</a:t>
+              <a:t>⏱ 5 + 10 + 25 + 10</a:t>
             </a:r>
           </a:p>
         </p:txBody>
@@ -6439,7 +6439,7 @@
             </a:pPr>
             <a:r>
               <a:rPr/>
-              <a:t>15 min: network boundary stance</a:t>
+              <a:t>25 min: network boundary stance</a:t>
             </a:r>
           </a:p>
           <a:p>
@@ -6457,7 +6457,7 @@
             </a:pPr>
             <a:r>
               <a:rPr/>
-              <a:t>⏱ 10 + 10 + 15 + 5</a:t>
+              <a:t>⏱ 10 + 10 + 25 + 5</a:t>
             </a:r>
           </a:p>
         </p:txBody>
@@ -7137,7 +7137,7 @@
             </a:pPr>
             <a:r>
               <a:rPr/>
-              <a:t>15 min: ROM cost table</a:t>
+              <a:t>25 min: ROM cost table</a:t>
             </a:r>
           </a:p>
           <a:p>
@@ -7173,7 +7173,7 @@
             </a:pPr>
             <a:r>
               <a:rPr/>
-              <a:t>⏱ 15 + 10 + 10 + 10 · 15-min wrap</a:t>
+              <a:t>⏱ 25 + 10 + 10 + 10 · 15-min wrap</a:t>
             </a:r>
           </a:p>
         </p:txBody>
@@ -8357,7 +8357,7 @@
             </a:pPr>
             <a:r>
               <a:rPr/>
-              <a:t>10 min: decide region(s)</a:t>
+              <a:t>20 min: decide region(s)</a:t>
             </a:r>
           </a:p>
           <a:p>
@@ -8384,7 +8384,7 @@
             </a:pPr>
             <a:r>
               <a:rPr/>
-              <a:t>⏱ 5 + 5 + 10 + 10 + 5</a:t>
+              <a:t>⏱ 5 + 5 + 20 + 10 + 5</a:t>
             </a:r>
           </a:p>
         </p:txBody>
